--- a/app/templates/colegio_de_profesores_del_peru/plantilla_curso_de_actualizacion.pptx
+++ b/app/templates/colegio_de_profesores_del_peru/plantilla_curso_de_actualizacion.pptx
@@ -113,6 +113,210 @@
 </p:presentation>
 </file>
 
+<file path=ppt/revisionInfo.xml><?xml version="1.0" encoding="utf-8"?>
+<p1510:revInfo xmlns:a="http://schemas.openxmlformats.org/drawingml/2006/main" xmlns:r="http://schemas.openxmlformats.org/officeDocument/2006/relationships" xmlns:p1510="http://schemas.microsoft.com/office/powerpoint/2015/10/main">
+  <p1510:revLst>
+    <p1510:client id="{EE9BE706-8116-4397-94A2-0B54A15C99A3}" v="4" dt="2026-03-05T19:06:39.167"/>
+  </p1510:revLst>
+</p1510:revInfo>
+</file>
+
+<file path=ppt/changesInfos/changesInfo1.xml><?xml version="1.0" encoding="utf-8"?>
+<pc:chgInfo xmlns:a="http://schemas.openxmlformats.org/drawingml/2006/main" xmlns:r="http://schemas.openxmlformats.org/officeDocument/2006/relationships" xmlns:ac="http://schemas.microsoft.com/office/drawing/2013/main/command" xmlns:pc="http://schemas.microsoft.com/office/powerpoint/2013/main/command">
+  <pc:docChgLst>
+    <pc:chgData name="Benjamín de Jesús Cueva Niño de Guzmán" userId="56da303013910523" providerId="LiveId" clId="{532B7A48-8887-4F62-9537-0BA1FAE83637}"/>
+    <pc:docChg chg="undo custSel modSld">
+      <pc:chgData name="Benjamín de Jesús Cueva Niño de Guzmán" userId="56da303013910523" providerId="LiveId" clId="{532B7A48-8887-4F62-9537-0BA1FAE83637}" dt="2026-03-05T19:06:39.166" v="43"/>
+      <pc:docMkLst>
+        <pc:docMk/>
+      </pc:docMkLst>
+      <pc:sldChg chg="addSp delSp modSp mod">
+        <pc:chgData name="Benjamín de Jesús Cueva Niño de Guzmán" userId="56da303013910523" providerId="LiveId" clId="{532B7A48-8887-4F62-9537-0BA1FAE83637}" dt="2026-03-04T23:45:51.828" v="35" actId="20577"/>
+        <pc:sldMkLst>
+          <pc:docMk/>
+          <pc:sldMk cId="3047749852" sldId="264"/>
+        </pc:sldMkLst>
+        <pc:spChg chg="del">
+          <ac:chgData name="Benjamín de Jesús Cueva Niño de Guzmán" userId="56da303013910523" providerId="LiveId" clId="{532B7A48-8887-4F62-9537-0BA1FAE83637}" dt="2026-03-04T23:45:43.438" v="19" actId="478"/>
+          <ac:spMkLst>
+            <pc:docMk/>
+            <pc:sldMk cId="3047749852" sldId="264"/>
+            <ac:spMk id="15" creationId="{00000000-0000-0000-0000-000000000000}"/>
+          </ac:spMkLst>
+        </pc:spChg>
+        <pc:spChg chg="del">
+          <ac:chgData name="Benjamín de Jesús Cueva Niño de Guzmán" userId="56da303013910523" providerId="LiveId" clId="{532B7A48-8887-4F62-9537-0BA1FAE83637}" dt="2026-03-04T23:45:43.438" v="19" actId="478"/>
+          <ac:spMkLst>
+            <pc:docMk/>
+            <pc:sldMk cId="3047749852" sldId="264"/>
+            <ac:spMk id="16" creationId="{00000000-0000-0000-0000-000000000000}"/>
+          </ac:spMkLst>
+        </pc:spChg>
+        <pc:spChg chg="del mod">
+          <ac:chgData name="Benjamín de Jesús Cueva Niño de Guzmán" userId="56da303013910523" providerId="LiveId" clId="{532B7A48-8887-4F62-9537-0BA1FAE83637}" dt="2026-03-04T23:45:43.438" v="19" actId="478"/>
+          <ac:spMkLst>
+            <pc:docMk/>
+            <pc:sldMk cId="3047749852" sldId="264"/>
+            <ac:spMk id="17" creationId="{00000000-0000-0000-0000-000000000000}"/>
+          </ac:spMkLst>
+        </pc:spChg>
+        <pc:spChg chg="del mod">
+          <ac:chgData name="Benjamín de Jesús Cueva Niño de Guzmán" userId="56da303013910523" providerId="LiveId" clId="{532B7A48-8887-4F62-9537-0BA1FAE83637}" dt="2026-03-04T23:45:43.438" v="19" actId="478"/>
+          <ac:spMkLst>
+            <pc:docMk/>
+            <pc:sldMk cId="3047749852" sldId="264"/>
+            <ac:spMk id="18" creationId="{00000000-0000-0000-0000-000000000000}"/>
+          </ac:spMkLst>
+        </pc:spChg>
+        <pc:spChg chg="add mod">
+          <ac:chgData name="Benjamín de Jesús Cueva Niño de Guzmán" userId="56da303013910523" providerId="LiveId" clId="{532B7A48-8887-4F62-9537-0BA1FAE83637}" dt="2026-03-04T23:45:47.535" v="20"/>
+          <ac:spMkLst>
+            <pc:docMk/>
+            <pc:sldMk cId="3047749852" sldId="264"/>
+            <ac:spMk id="20" creationId="{A3BBAC0E-11D2-1486-E4F6-F0C9D5AD7452}"/>
+          </ac:spMkLst>
+        </pc:spChg>
+        <pc:spChg chg="add mod">
+          <ac:chgData name="Benjamín de Jesús Cueva Niño de Guzmán" userId="56da303013910523" providerId="LiveId" clId="{532B7A48-8887-4F62-9537-0BA1FAE83637}" dt="2026-03-04T23:45:47.535" v="20"/>
+          <ac:spMkLst>
+            <pc:docMk/>
+            <pc:sldMk cId="3047749852" sldId="264"/>
+            <ac:spMk id="21" creationId="{1803E6AB-3D88-71B2-F8B9-9A25CAB82F59}"/>
+          </ac:spMkLst>
+        </pc:spChg>
+        <pc:spChg chg="add mod">
+          <ac:chgData name="Benjamín de Jesús Cueva Niño de Guzmán" userId="56da303013910523" providerId="LiveId" clId="{532B7A48-8887-4F62-9537-0BA1FAE83637}" dt="2026-03-04T23:45:51.828" v="35" actId="20577"/>
+          <ac:spMkLst>
+            <pc:docMk/>
+            <pc:sldMk cId="3047749852" sldId="264"/>
+            <ac:spMk id="22" creationId="{B4CB21F4-F654-8BAA-FFF5-311EE61B8A2A}"/>
+          </ac:spMkLst>
+        </pc:spChg>
+      </pc:sldChg>
+      <pc:sldChg chg="addSp delSp modSp mod">
+        <pc:chgData name="Benjamín de Jesús Cueva Niño de Guzmán" userId="56da303013910523" providerId="LiveId" clId="{532B7A48-8887-4F62-9537-0BA1FAE83637}" dt="2026-03-05T19:06:39.166" v="43"/>
+        <pc:sldMkLst>
+          <pc:docMk/>
+          <pc:sldMk cId="1210459346" sldId="265"/>
+        </pc:sldMkLst>
+        <pc:spChg chg="add mod">
+          <ac:chgData name="Benjamín de Jesús Cueva Niño de Guzmán" userId="56da303013910523" providerId="LiveId" clId="{532B7A48-8887-4F62-9537-0BA1FAE83637}" dt="2026-03-05T19:06:39.166" v="43"/>
+          <ac:spMkLst>
+            <pc:docMk/>
+            <pc:sldMk cId="1210459346" sldId="265"/>
+            <ac:spMk id="3" creationId="{A06F1E4D-5079-EDF6-55A4-1ACC756A857C}"/>
+          </ac:spMkLst>
+        </pc:spChg>
+        <pc:spChg chg="del">
+          <ac:chgData name="Benjamín de Jesús Cueva Niño de Guzmán" userId="56da303013910523" providerId="LiveId" clId="{532B7A48-8887-4F62-9537-0BA1FAE83637}" dt="2026-03-04T23:46:12.559" v="37" actId="478"/>
+          <ac:spMkLst>
+            <pc:docMk/>
+            <pc:sldMk cId="1210459346" sldId="265"/>
+            <ac:spMk id="4" creationId="{385E0D12-7AAE-301C-8B48-6FE48D0B69EE}"/>
+          </ac:spMkLst>
+        </pc:spChg>
+        <pc:spChg chg="mod">
+          <ac:chgData name="Benjamín de Jesús Cueva Niño de Guzmán" userId="56da303013910523" providerId="LiveId" clId="{532B7A48-8887-4F62-9537-0BA1FAE83637}" dt="2026-03-02T15:14:57.920" v="0"/>
+          <ac:spMkLst>
+            <pc:docMk/>
+            <pc:sldMk cId="1210459346" sldId="265"/>
+            <ac:spMk id="5" creationId="{E0A46DE0-4206-1407-A8C2-63B7396BEB4C}"/>
+          </ac:spMkLst>
+        </pc:spChg>
+        <pc:spChg chg="mod">
+          <ac:chgData name="Benjamín de Jesús Cueva Niño de Guzmán" userId="56da303013910523" providerId="LiveId" clId="{532B7A48-8887-4F62-9537-0BA1FAE83637}" dt="2026-03-02T15:14:57.920" v="0"/>
+          <ac:spMkLst>
+            <pc:docMk/>
+            <pc:sldMk cId="1210459346" sldId="265"/>
+            <ac:spMk id="7" creationId="{D211A08D-4E13-5AB5-60E4-A6F4E4D4541D}"/>
+          </ac:spMkLst>
+        </pc:spChg>
+        <pc:spChg chg="add del mod">
+          <ac:chgData name="Benjamín de Jesús Cueva Niño de Guzmán" userId="56da303013910523" providerId="LiveId" clId="{532B7A48-8887-4F62-9537-0BA1FAE83637}" dt="2026-03-05T19:06:38.759" v="42" actId="478"/>
+          <ac:spMkLst>
+            <pc:docMk/>
+            <pc:sldMk cId="1210459346" sldId="265"/>
+            <ac:spMk id="8" creationId="{E7687563-C7AC-F428-B32B-9624DEC001B4}"/>
+          </ac:spMkLst>
+        </pc:spChg>
+        <pc:spChg chg="add mod">
+          <ac:chgData name="Benjamín de Jesús Cueva Niño de Guzmán" userId="56da303013910523" providerId="LiveId" clId="{532B7A48-8887-4F62-9537-0BA1FAE83637}" dt="2026-03-04T23:46:12.902" v="38"/>
+          <ac:spMkLst>
+            <pc:docMk/>
+            <pc:sldMk cId="1210459346" sldId="265"/>
+            <ac:spMk id="13" creationId="{873437E8-7AD9-E519-83CA-BDC25F73BBC3}"/>
+          </ac:spMkLst>
+        </pc:spChg>
+        <pc:grpChg chg="add mod">
+          <ac:chgData name="Benjamín de Jesús Cueva Niño de Guzmán" userId="56da303013910523" providerId="LiveId" clId="{532B7A48-8887-4F62-9537-0BA1FAE83637}" dt="2026-03-02T15:14:57.920" v="0"/>
+          <ac:grpSpMkLst>
+            <pc:docMk/>
+            <pc:sldMk cId="1210459346" sldId="265"/>
+            <ac:grpSpMk id="2" creationId="{0285E362-8AB4-23F9-C75C-E094870657DF}"/>
+          </ac:grpSpMkLst>
+        </pc:grpChg>
+        <pc:graphicFrameChg chg="add mod">
+          <ac:chgData name="Benjamín de Jesús Cueva Niño de Guzmán" userId="56da303013910523" providerId="LiveId" clId="{532B7A48-8887-4F62-9537-0BA1FAE83637}" dt="2026-03-04T23:46:12.902" v="38"/>
+          <ac:graphicFrameMkLst>
+            <pc:docMk/>
+            <pc:sldMk cId="1210459346" sldId="265"/>
+            <ac:graphicFrameMk id="9" creationId="{98EC4024-83C4-4092-6CDC-BD6544E245DE}"/>
+          </ac:graphicFrameMkLst>
+        </pc:graphicFrameChg>
+        <pc:graphicFrameChg chg="add mod">
+          <ac:chgData name="Benjamín de Jesús Cueva Niño de Guzmán" userId="56da303013910523" providerId="LiveId" clId="{532B7A48-8887-4F62-9537-0BA1FAE83637}" dt="2026-03-04T23:46:12.902" v="38"/>
+          <ac:graphicFrameMkLst>
+            <pc:docMk/>
+            <pc:sldMk cId="1210459346" sldId="265"/>
+            <ac:graphicFrameMk id="10" creationId="{2CB58EC6-8178-4205-4E0B-A83F55CF67CA}"/>
+          </ac:graphicFrameMkLst>
+        </pc:graphicFrameChg>
+        <pc:graphicFrameChg chg="del">
+          <ac:chgData name="Benjamín de Jesús Cueva Niño de Guzmán" userId="56da303013910523" providerId="LiveId" clId="{532B7A48-8887-4F62-9537-0BA1FAE83637}" dt="2026-03-04T23:46:07.058" v="36" actId="478"/>
+          <ac:graphicFrameMkLst>
+            <pc:docMk/>
+            <pc:sldMk cId="1210459346" sldId="265"/>
+            <ac:graphicFrameMk id="20" creationId="{00000000-0000-0000-0000-000000000000}"/>
+          </ac:graphicFrameMkLst>
+        </pc:graphicFrameChg>
+        <pc:graphicFrameChg chg="del">
+          <ac:chgData name="Benjamín de Jesús Cueva Niño de Guzmán" userId="56da303013910523" providerId="LiveId" clId="{532B7A48-8887-4F62-9537-0BA1FAE83637}" dt="2026-03-04T23:46:07.058" v="36" actId="478"/>
+          <ac:graphicFrameMkLst>
+            <pc:docMk/>
+            <pc:sldMk cId="1210459346" sldId="265"/>
+            <ac:graphicFrameMk id="21" creationId="{00000000-0000-0000-0000-000000000000}"/>
+          </ac:graphicFrameMkLst>
+        </pc:graphicFrameChg>
+        <pc:graphicFrameChg chg="modGraphic">
+          <ac:chgData name="Benjamín de Jesús Cueva Niño de Guzmán" userId="56da303013910523" providerId="LiveId" clId="{532B7A48-8887-4F62-9537-0BA1FAE83637}" dt="2026-03-04T23:46:24.386" v="41" actId="404"/>
+          <ac:graphicFrameMkLst>
+            <pc:docMk/>
+            <pc:sldMk cId="1210459346" sldId="265"/>
+            <ac:graphicFrameMk id="29" creationId="{00000000-0000-0000-0000-000000000000}"/>
+          </ac:graphicFrameMkLst>
+        </pc:graphicFrameChg>
+        <pc:picChg chg="del">
+          <ac:chgData name="Benjamín de Jesús Cueva Niño de Guzmán" userId="56da303013910523" providerId="LiveId" clId="{532B7A48-8887-4F62-9537-0BA1FAE83637}" dt="2026-03-04T23:46:07.058" v="36" actId="478"/>
+          <ac:picMkLst>
+            <pc:docMk/>
+            <pc:sldMk cId="1210459346" sldId="265"/>
+            <ac:picMk id="3" creationId="{AB7EE0B6-B919-423B-6A1B-5DB7F9F6C8DB}"/>
+          </ac:picMkLst>
+        </pc:picChg>
+        <pc:picChg chg="add mod">
+          <ac:chgData name="Benjamín de Jesús Cueva Niño de Guzmán" userId="56da303013910523" providerId="LiveId" clId="{532B7A48-8887-4F62-9537-0BA1FAE83637}" dt="2026-03-04T23:46:12.902" v="38"/>
+          <ac:picMkLst>
+            <pc:docMk/>
+            <pc:sldMk cId="1210459346" sldId="265"/>
+            <ac:picMk id="11" creationId="{4BE6CA18-ED91-8A8D-69FE-C95D02C0A420}"/>
+          </ac:picMkLst>
+        </pc:picChg>
+      </pc:sldChg>
+    </pc:docChg>
+  </pc:docChgLst>
+</pc:chgInfo>
+</file>
+
 <file path=ppt/slideLayouts/slideLayout1.xml><?xml version="1.0" encoding="utf-8"?>
 <p:sldLayout xmlns:a="http://schemas.openxmlformats.org/drawingml/2006/main" xmlns:r="http://schemas.openxmlformats.org/officeDocument/2006/relationships" xmlns:p="http://schemas.openxmlformats.org/presentationml/2006/main" type="title" preserve="1">
   <p:cSld name="Diapositiva de título">
@@ -244,7 +448,7 @@
           <a:p>
             <a:fld id="{6B5BCF65-E86E-467A-B19A-9BBB66F1E598}" type="datetimeFigureOut">
               <a:rPr lang="es-PE" smtClean="0"/>
-              <a:t>15/02/2026</a:t>
+              <a:t>5/03/2026</a:t>
             </a:fld>
             <a:endParaRPr lang="es-PE"/>
           </a:p>
@@ -414,7 +618,7 @@
           <a:p>
             <a:fld id="{6B5BCF65-E86E-467A-B19A-9BBB66F1E598}" type="datetimeFigureOut">
               <a:rPr lang="es-PE" smtClean="0"/>
-              <a:t>15/02/2026</a:t>
+              <a:t>5/03/2026</a:t>
             </a:fld>
             <a:endParaRPr lang="es-PE"/>
           </a:p>
@@ -594,7 +798,7 @@
           <a:p>
             <a:fld id="{6B5BCF65-E86E-467A-B19A-9BBB66F1E598}" type="datetimeFigureOut">
               <a:rPr lang="es-PE" smtClean="0"/>
-              <a:t>15/02/2026</a:t>
+              <a:t>5/03/2026</a:t>
             </a:fld>
             <a:endParaRPr lang="es-PE"/>
           </a:p>
@@ -764,7 +968,7 @@
           <a:p>
             <a:fld id="{6B5BCF65-E86E-467A-B19A-9BBB66F1E598}" type="datetimeFigureOut">
               <a:rPr lang="es-PE" smtClean="0"/>
-              <a:t>15/02/2026</a:t>
+              <a:t>5/03/2026</a:t>
             </a:fld>
             <a:endParaRPr lang="es-PE"/>
           </a:p>
@@ -1008,7 +1212,7 @@
           <a:p>
             <a:fld id="{6B5BCF65-E86E-467A-B19A-9BBB66F1E598}" type="datetimeFigureOut">
               <a:rPr lang="es-PE" smtClean="0"/>
-              <a:t>15/02/2026</a:t>
+              <a:t>5/03/2026</a:t>
             </a:fld>
             <a:endParaRPr lang="es-PE"/>
           </a:p>
@@ -1240,7 +1444,7 @@
           <a:p>
             <a:fld id="{6B5BCF65-E86E-467A-B19A-9BBB66F1E598}" type="datetimeFigureOut">
               <a:rPr lang="es-PE" smtClean="0"/>
-              <a:t>15/02/2026</a:t>
+              <a:t>5/03/2026</a:t>
             </a:fld>
             <a:endParaRPr lang="es-PE"/>
           </a:p>
@@ -1607,7 +1811,7 @@
           <a:p>
             <a:fld id="{6B5BCF65-E86E-467A-B19A-9BBB66F1E598}" type="datetimeFigureOut">
               <a:rPr lang="es-PE" smtClean="0"/>
-              <a:t>15/02/2026</a:t>
+              <a:t>5/03/2026</a:t>
             </a:fld>
             <a:endParaRPr lang="es-PE"/>
           </a:p>
@@ -1725,7 +1929,7 @@
           <a:p>
             <a:fld id="{6B5BCF65-E86E-467A-B19A-9BBB66F1E598}" type="datetimeFigureOut">
               <a:rPr lang="es-PE" smtClean="0"/>
-              <a:t>15/02/2026</a:t>
+              <a:t>5/03/2026</a:t>
             </a:fld>
             <a:endParaRPr lang="es-PE"/>
           </a:p>
@@ -1820,7 +2024,7 @@
           <a:p>
             <a:fld id="{6B5BCF65-E86E-467A-B19A-9BBB66F1E598}" type="datetimeFigureOut">
               <a:rPr lang="es-PE" smtClean="0"/>
-              <a:t>15/02/2026</a:t>
+              <a:t>5/03/2026</a:t>
             </a:fld>
             <a:endParaRPr lang="es-PE"/>
           </a:p>
@@ -2097,7 +2301,7 @@
           <a:p>
             <a:fld id="{6B5BCF65-E86E-467A-B19A-9BBB66F1E598}" type="datetimeFigureOut">
               <a:rPr lang="es-PE" smtClean="0"/>
-              <a:t>15/02/2026</a:t>
+              <a:t>5/03/2026</a:t>
             </a:fld>
             <a:endParaRPr lang="es-PE"/>
           </a:p>
@@ -2354,7 +2558,7 @@
           <a:p>
             <a:fld id="{6B5BCF65-E86E-467A-B19A-9BBB66F1E598}" type="datetimeFigureOut">
               <a:rPr lang="es-PE" smtClean="0"/>
-              <a:t>15/02/2026</a:t>
+              <a:t>5/03/2026</a:t>
             </a:fld>
             <a:endParaRPr lang="es-PE"/>
           </a:p>
@@ -2567,7 +2771,7 @@
           <a:p>
             <a:fld id="{6B5BCF65-E86E-467A-B19A-9BBB66F1E598}" type="datetimeFigureOut">
               <a:rPr lang="es-PE" smtClean="0"/>
-              <a:t>15/02/2026</a:t>
+              <a:t>5/03/2026</a:t>
             </a:fld>
             <a:endParaRPr lang="es-PE"/>
           </a:p>
@@ -3102,178 +3306,6 @@
       </p:sp>
       <p:sp>
         <p:nvSpPr>
-          <p:cNvPr id="15" name="CuadroTexto 14"/>
-          <p:cNvSpPr txBox="1"/>
-          <p:nvPr/>
-        </p:nvSpPr>
-        <p:spPr>
-          <a:xfrm>
-            <a:off x="4252904" y="1340914"/>
-            <a:ext cx="1400192" cy="369332"/>
-          </a:xfrm>
-          <a:prstGeom prst="rect">
-            <a:avLst/>
-          </a:prstGeom>
-          <a:noFill/>
-        </p:spPr>
-        <p:txBody>
-          <a:bodyPr wrap="none" rtlCol="0">
-            <a:spAutoFit/>
-          </a:bodyPr>
-          <a:lstStyle/>
-          <a:p>
-            <a:r>
-              <a:rPr lang="es-PE" dirty="0">
-                <a:latin typeface="Franklin Gothic Demi Cond" panose="020B0706030402020204" pitchFamily="34" charset="0"/>
-              </a:rPr>
-              <a:t>OTORGADO A:</a:t>
-            </a:r>
-          </a:p>
-        </p:txBody>
-      </p:sp>
-      <p:sp>
-        <p:nvSpPr>
-          <p:cNvPr id="16" name="CuadroTexto 15"/>
-          <p:cNvSpPr txBox="1"/>
-          <p:nvPr/>
-        </p:nvSpPr>
-        <p:spPr>
-          <a:xfrm>
-            <a:off x="2493035" y="1556955"/>
-            <a:ext cx="4919937" cy="523220"/>
-          </a:xfrm>
-          <a:prstGeom prst="rect">
-            <a:avLst/>
-          </a:prstGeom>
-          <a:noFill/>
-        </p:spPr>
-        <p:txBody>
-          <a:bodyPr wrap="none" rtlCol="0">
-            <a:spAutoFit/>
-          </a:bodyPr>
-          <a:lstStyle/>
-          <a:p>
-            <a:pPr algn="ctr"/>
-            <a:r>
-              <a:rPr lang="es-PE" sz="2800" dirty="0">
-                <a:latin typeface="Britannic Bold" panose="020B0903060703020204" pitchFamily="34" charset="0"/>
-              </a:rPr>
-              <a:t>{{NOMBRES}} {{APELLIDOS}}</a:t>
-            </a:r>
-          </a:p>
-        </p:txBody>
-      </p:sp>
-      <p:sp>
-        <p:nvSpPr>
-          <p:cNvPr id="17" name="CuadroTexto 16"/>
-          <p:cNvSpPr txBox="1"/>
-          <p:nvPr/>
-        </p:nvSpPr>
-        <p:spPr>
-          <a:xfrm>
-            <a:off x="-90772" y="1962231"/>
-            <a:ext cx="10087570" cy="2185214"/>
-          </a:xfrm>
-          <a:prstGeom prst="rect">
-            <a:avLst/>
-          </a:prstGeom>
-          <a:noFill/>
-        </p:spPr>
-        <p:txBody>
-          <a:bodyPr wrap="none" rtlCol="0">
-            <a:spAutoFit/>
-          </a:bodyPr>
-          <a:lstStyle/>
-          <a:p>
-            <a:pPr algn="ctr"/>
-            <a:r>
-              <a:rPr lang="es-PE" b="1" dirty="0"/>
-              <a:t>Por haber culminado satisfactoriamente el CURSO </a:t>
-            </a:r>
-          </a:p>
-          <a:p>
-            <a:pPr algn="ctr"/>
-            <a:r>
-              <a:rPr lang="es-PE" b="1"/>
-              <a:t>DE ACTUALIZACIÓN </a:t>
-            </a:r>
-            <a:r>
-              <a:rPr lang="es-PE" b="1" dirty="0"/>
-              <a:t>en:</a:t>
-            </a:r>
-            <a:endParaRPr lang="es-PE" sz="600" b="1" dirty="0"/>
-          </a:p>
-          <a:p>
-            <a:pPr algn="ctr"/>
-            <a:r>
-              <a:rPr lang="es-PE" sz="2800" dirty="0">
-                <a:latin typeface="Britannic Bold" panose="020B0903060703020204" pitchFamily="34" charset="0"/>
-              </a:rPr>
-              <a:t>“{{TEMA_DIPLOMADO}}”</a:t>
-            </a:r>
-          </a:p>
-          <a:p>
-            <a:pPr algn="ctr"/>
-            <a:r>
-              <a:rPr lang="es-PE" b="1" dirty="0"/>
-              <a:t>Realizado del {{FECHA_INICIO}} al {{FECHA_FIN}}, con una</a:t>
-            </a:r>
-          </a:p>
-          <a:p>
-            <a:pPr algn="ctr"/>
-            <a:r>
-              <a:rPr lang="es-PE" b="1" dirty="0"/>
-              <a:t>duración de {{HORAS_ACADEMICAS}} horas lectivas y {{CREDITOS_ACADEMICOS}} créditos Académicos.</a:t>
-            </a:r>
-          </a:p>
-          <a:p>
-            <a:pPr algn="ctr"/>
-            <a:r>
-              <a:rPr lang="es-PE" b="1" dirty="0"/>
-              <a:t>Por tanto, se expide el presente Certificado, otorgándole los</a:t>
-            </a:r>
-          </a:p>
-          <a:p>
-            <a:pPr algn="ctr"/>
-            <a:r>
-              <a:rPr lang="es-PE" b="1" dirty="0"/>
-              <a:t>privilegios y consideraciones que le corresponden.</a:t>
-            </a:r>
-          </a:p>
-        </p:txBody>
-      </p:sp>
-      <p:sp>
-        <p:nvSpPr>
-          <p:cNvPr id="18" name="CuadroTexto 17"/>
-          <p:cNvSpPr txBox="1"/>
-          <p:nvPr/>
-        </p:nvSpPr>
-        <p:spPr>
-          <a:xfrm>
-            <a:off x="5752362" y="4270354"/>
-            <a:ext cx="3629904" cy="369332"/>
-          </a:xfrm>
-          <a:prstGeom prst="rect">
-            <a:avLst/>
-          </a:prstGeom>
-          <a:noFill/>
-        </p:spPr>
-        <p:txBody>
-          <a:bodyPr wrap="none" rtlCol="0">
-            <a:spAutoFit/>
-          </a:bodyPr>
-          <a:lstStyle/>
-          <a:p>
-            <a:pPr algn="r"/>
-            <a:r>
-              <a:rPr lang="es-PE" b="1" dirty="0"/>
-              <a:t>Trujillo, {{FECHA_EMISION_LARGA}}</a:t>
-            </a:r>
-          </a:p>
-        </p:txBody>
-      </p:sp>
-      <p:sp>
-        <p:nvSpPr>
           <p:cNvPr id="26" name="CuadroTexto 25"/>
           <p:cNvSpPr txBox="1"/>
           <p:nvPr/>
@@ -3707,6 +3739,173 @@
           </a:extLst>
         </p:spPr>
       </p:pic>
+      <p:sp>
+        <p:nvSpPr>
+          <p:cNvPr id="20" name="CuadroTexto 19">
+            <a:extLst>
+              <a:ext uri="{FF2B5EF4-FFF2-40B4-BE49-F238E27FC236}">
+                <a16:creationId xmlns:a16="http://schemas.microsoft.com/office/drawing/2014/main" id="{A3BBAC0E-11D2-1486-E4F6-F0C9D5AD7452}"/>
+              </a:ext>
+            </a:extLst>
+          </p:cNvPr>
+          <p:cNvSpPr txBox="1"/>
+          <p:nvPr/>
+        </p:nvSpPr>
+        <p:spPr>
+          <a:xfrm>
+            <a:off x="4252904" y="1275597"/>
+            <a:ext cx="1400192" cy="369332"/>
+          </a:xfrm>
+          <a:prstGeom prst="rect">
+            <a:avLst/>
+          </a:prstGeom>
+          <a:noFill/>
+        </p:spPr>
+        <p:txBody>
+          <a:bodyPr wrap="none" rtlCol="0">
+            <a:spAutoFit/>
+          </a:bodyPr>
+          <a:lstStyle/>
+          <a:p>
+            <a:r>
+              <a:rPr lang="es-PE" dirty="0">
+                <a:latin typeface="Franklin Gothic Demi Cond" panose="020B0706030402020204" pitchFamily="34" charset="0"/>
+              </a:rPr>
+              <a:t>OTORGADO A:</a:t>
+            </a:r>
+          </a:p>
+        </p:txBody>
+      </p:sp>
+      <p:sp>
+        <p:nvSpPr>
+          <p:cNvPr id="21" name="CuadroTexto 20">
+            <a:extLst>
+              <a:ext uri="{FF2B5EF4-FFF2-40B4-BE49-F238E27FC236}">
+                <a16:creationId xmlns:a16="http://schemas.microsoft.com/office/drawing/2014/main" id="{1803E6AB-3D88-71B2-F8B9-9A25CAB82F59}"/>
+              </a:ext>
+            </a:extLst>
+          </p:cNvPr>
+          <p:cNvSpPr txBox="1"/>
+          <p:nvPr/>
+        </p:nvSpPr>
+        <p:spPr>
+          <a:xfrm>
+            <a:off x="2493035" y="1500969"/>
+            <a:ext cx="4919937" cy="523220"/>
+          </a:xfrm>
+          <a:prstGeom prst="rect">
+            <a:avLst/>
+          </a:prstGeom>
+          <a:noFill/>
+        </p:spPr>
+        <p:txBody>
+          <a:bodyPr wrap="none" rtlCol="0">
+            <a:spAutoFit/>
+          </a:bodyPr>
+          <a:lstStyle/>
+          <a:p>
+            <a:pPr algn="ctr"/>
+            <a:r>
+              <a:rPr lang="es-PE" sz="2800" dirty="0">
+                <a:latin typeface="Britannic Bold" panose="020B0903060703020204" pitchFamily="34" charset="0"/>
+              </a:rPr>
+              <a:t>{{NOMBRES}} {{APELLIDOS}}</a:t>
+            </a:r>
+          </a:p>
+        </p:txBody>
+      </p:sp>
+      <p:sp>
+        <p:nvSpPr>
+          <p:cNvPr id="22" name="CuadroTexto 21">
+            <a:extLst>
+              <a:ext uri="{FF2B5EF4-FFF2-40B4-BE49-F238E27FC236}">
+                <a16:creationId xmlns:a16="http://schemas.microsoft.com/office/drawing/2014/main" id="{B4CB21F4-F654-8BAA-FFF5-311EE61B8A2A}"/>
+              </a:ext>
+            </a:extLst>
+          </p:cNvPr>
+          <p:cNvSpPr txBox="1"/>
+          <p:nvPr/>
+        </p:nvSpPr>
+        <p:spPr>
+          <a:xfrm>
+            <a:off x="380775" y="1915576"/>
+            <a:ext cx="9144451" cy="2800767"/>
+          </a:xfrm>
+          <a:prstGeom prst="rect">
+            <a:avLst/>
+          </a:prstGeom>
+          <a:noFill/>
+        </p:spPr>
+        <p:txBody>
+          <a:bodyPr wrap="square" rtlCol="0" anchor="t" anchorCtr="1">
+            <a:spAutoFit/>
+          </a:bodyPr>
+          <a:lstStyle/>
+          <a:p>
+            <a:pPr algn="ctr"/>
+            <a:r>
+              <a:rPr lang="es-PE" b="1" dirty="0"/>
+              <a:t>Por haber culminado satisfactoriamente el CURSO </a:t>
+            </a:r>
+          </a:p>
+          <a:p>
+            <a:pPr algn="ctr"/>
+            <a:r>
+              <a:rPr lang="es-PE" b="1" dirty="0"/>
+              <a:t>DE ACTUALIZACIÓN en:</a:t>
+            </a:r>
+            <a:endParaRPr lang="es-PE" sz="600" b="1" dirty="0"/>
+          </a:p>
+          <a:p>
+            <a:pPr algn="ctr"/>
+            <a:r>
+              <a:rPr lang="es-PE" sz="2800" dirty="0">
+                <a:latin typeface="Britannic Bold" panose="020B0903060703020204" pitchFamily="34" charset="0"/>
+              </a:rPr>
+              <a:t>“{{TEMA_DIPLOMADO}}”</a:t>
+            </a:r>
+          </a:p>
+          <a:p>
+            <a:pPr algn="ctr"/>
+            <a:r>
+              <a:rPr lang="es-PE" b="1" dirty="0"/>
+              <a:t>Realizado del {{FECHA_INICIO}} al {{FECHA_FIN}}, con una</a:t>
+            </a:r>
+          </a:p>
+          <a:p>
+            <a:pPr algn="ctr"/>
+            <a:r>
+              <a:rPr lang="es-PE" b="1" dirty="0"/>
+              <a:t>duración de {{HORAS_ACADEMICAS}} horas lectivas y {{CREDITOS_ACADEMICOS}} créditos Académicos.</a:t>
+            </a:r>
+          </a:p>
+          <a:p>
+            <a:pPr algn="ctr"/>
+            <a:r>
+              <a:rPr lang="es-PE" b="1" dirty="0"/>
+              <a:t>Por tanto, se expide el presente Certificado, otorgándole los</a:t>
+            </a:r>
+          </a:p>
+          <a:p>
+            <a:pPr algn="ctr"/>
+            <a:r>
+              <a:rPr lang="es-PE" b="1" dirty="0"/>
+              <a:t>privilegios y consideraciones que le corresponden.</a:t>
+            </a:r>
+          </a:p>
+          <a:p>
+            <a:pPr algn="ctr"/>
+            <a:endParaRPr lang="es-PE" sz="400" b="1" dirty="0"/>
+          </a:p>
+          <a:p>
+            <a:pPr algn="r"/>
+            <a:r>
+              <a:rPr lang="es-PE" b="1" dirty="0"/>
+              <a:t>Trujillo, {{FECHA_EMISION_LARGA}}</a:t>
+            </a:r>
+          </a:p>
+        </p:txBody>
+      </p:sp>
     </p:spTree>
     <p:extLst>
       <p:ext uri="{BB962C8B-B14F-4D97-AF65-F5344CB8AC3E}">
@@ -3855,22 +4054,651 @@
           </a:p>
         </p:txBody>
       </p:sp>
+      <p:pic>
+        <p:nvPicPr>
+          <p:cNvPr id="12" name="Imagen 11"/>
+          <p:cNvPicPr>
+            <a:picLocks noChangeAspect="1"/>
+          </p:cNvPicPr>
+          <p:nvPr/>
+        </p:nvPicPr>
+        <p:blipFill>
+          <a:blip r:embed="rId3"/>
+          <a:stretch>
+            <a:fillRect/>
+          </a:stretch>
+        </p:blipFill>
+        <p:spPr>
+          <a:xfrm>
+            <a:off x="6298442" y="199447"/>
+            <a:ext cx="2957853" cy="758326"/>
+          </a:xfrm>
+          <a:prstGeom prst="rect">
+            <a:avLst/>
+          </a:prstGeom>
+        </p:spPr>
+      </p:pic>
+      <p:pic>
+        <p:nvPicPr>
+          <p:cNvPr id="27" name="Imagen 26"/>
+          <p:cNvPicPr>
+            <a:picLocks noChangeAspect="1"/>
+          </p:cNvPicPr>
+          <p:nvPr/>
+        </p:nvPicPr>
+        <p:blipFill rotWithShape="1">
+          <a:blip r:embed="rId4"/>
+          <a:srcRect l="4716" r="4485"/>
+          <a:stretch/>
+        </p:blipFill>
+        <p:spPr>
+          <a:xfrm>
+            <a:off x="534757" y="230243"/>
+            <a:ext cx="2563572" cy="864296"/>
+          </a:xfrm>
+          <a:prstGeom prst="rect">
+            <a:avLst/>
+          </a:prstGeom>
+        </p:spPr>
+      </p:pic>
+      <p:sp>
+        <p:nvSpPr>
+          <p:cNvPr id="28" name="CuadroTexto 27"/>
+          <p:cNvSpPr txBox="1"/>
+          <p:nvPr/>
+        </p:nvSpPr>
+        <p:spPr>
+          <a:xfrm>
+            <a:off x="792801" y="982048"/>
+            <a:ext cx="1642822" cy="338554"/>
+          </a:xfrm>
+          <a:prstGeom prst="rect">
+            <a:avLst/>
+          </a:prstGeom>
+          <a:noFill/>
+        </p:spPr>
+        <p:txBody>
+          <a:bodyPr wrap="none" rtlCol="0">
+            <a:spAutoFit/>
+          </a:bodyPr>
+          <a:lstStyle/>
+          <a:p>
+            <a:r>
+              <a:rPr lang="es-PE" sz="1600" b="1" dirty="0"/>
+              <a:t>R.P N° 1127 1967</a:t>
+            </a:r>
+          </a:p>
+        </p:txBody>
+      </p:sp>
       <p:graphicFrame>
         <p:nvGraphicFramePr>
-          <p:cNvPr id="20" name="Tabla 19"/>
+          <p:cNvPr id="24" name="Tabla 23"/>
           <p:cNvGraphicFramePr>
             <a:graphicFrameLocks noGrp="1"/>
           </p:cNvGraphicFramePr>
+          <p:nvPr/>
+        </p:nvGraphicFramePr>
+        <p:xfrm>
+          <a:off x="3203501" y="1539657"/>
+          <a:ext cx="6412523" cy="434622"/>
+        </p:xfrm>
+        <a:graphic>
+          <a:graphicData uri="http://schemas.openxmlformats.org/drawingml/2006/table">
+            <a:tbl>
+              <a:tblPr firstRow="1" bandRow="1">
+                <a:tableStyleId>{F5AB1C69-6EDB-4FF4-983F-18BD219EF322}</a:tableStyleId>
+              </a:tblPr>
+              <a:tblGrid>
+                <a:gridCol w="6412523">
+                  <a:extLst>
+                    <a:ext uri="{9D8B030D-6E8A-4147-A177-3AD203B41FA5}">
+                      <a16:colId xmlns:a16="http://schemas.microsoft.com/office/drawing/2014/main" val="335546556"/>
+                    </a:ext>
+                  </a:extLst>
+                </a:gridCol>
+              </a:tblGrid>
+              <a:tr h="308522">
+                <a:tc>
+                  <a:txBody>
+                    <a:bodyPr/>
+                    <a:lstStyle/>
+                    <a:p>
+                      <a:pPr algn="ctr"/>
+                      <a:r>
+                        <a:rPr lang="es-PE" sz="1600" u="none" dirty="0"/>
+                        <a:t>TEMARIO</a:t>
+                      </a:r>
+                      <a:endParaRPr lang="es-PE" sz="1600" u="none" baseline="0" dirty="0">
+                        <a:latin typeface="Arial Black" panose="020B0A04020102020204" pitchFamily="34" charset="0"/>
+                      </a:endParaRPr>
+                    </a:p>
+                  </a:txBody>
+                  <a:tcPr marL="190782" marR="190782" marT="95391" marB="95391" anchor="ctr">
+                    <a:lnL w="12700" cap="flat" cmpd="sng" algn="ctr">
+                      <a:solidFill>
+                        <a:schemeClr val="tx1"/>
+                      </a:solidFill>
+                      <a:prstDash val="solid"/>
+                      <a:round/>
+                      <a:headEnd type="none" w="med" len="med"/>
+                      <a:tailEnd type="none" w="med" len="med"/>
+                    </a:lnL>
+                    <a:lnR w="12700" cap="flat" cmpd="sng" algn="ctr">
+                      <a:solidFill>
+                        <a:schemeClr val="tx1"/>
+                      </a:solidFill>
+                      <a:prstDash val="solid"/>
+                      <a:round/>
+                      <a:headEnd type="none" w="med" len="med"/>
+                      <a:tailEnd type="none" w="med" len="med"/>
+                    </a:lnR>
+                    <a:lnT w="12700" cap="flat" cmpd="sng" algn="ctr">
+                      <a:solidFill>
+                        <a:schemeClr val="tx1"/>
+                      </a:solidFill>
+                      <a:prstDash val="solid"/>
+                      <a:round/>
+                      <a:headEnd type="none" w="med" len="med"/>
+                      <a:tailEnd type="none" w="med" len="med"/>
+                    </a:lnT>
+                    <a:lnB w="12700" cap="flat" cmpd="sng" algn="ctr">
+                      <a:solidFill>
+                        <a:schemeClr val="tx1"/>
+                      </a:solidFill>
+                      <a:prstDash val="solid"/>
+                      <a:round/>
+                      <a:headEnd type="none" w="med" len="med"/>
+                      <a:tailEnd type="none" w="med" len="med"/>
+                    </a:lnB>
+                    <a:lnTlToBr w="12700" cmpd="sng">
+                      <a:noFill/>
+                      <a:prstDash val="solid"/>
+                    </a:lnTlToBr>
+                    <a:lnBlToTr w="12700" cmpd="sng">
+                      <a:noFill/>
+                      <a:prstDash val="solid"/>
+                    </a:lnBlToTr>
+                  </a:tcPr>
+                </a:tc>
+                <a:extLst>
+                  <a:ext uri="{0D108BD9-81ED-4DB2-BD59-A6C34878D82A}">
+                    <a16:rowId xmlns:a16="http://schemas.microsoft.com/office/drawing/2014/main" val="4034874865"/>
+                  </a:ext>
+                </a:extLst>
+              </a:tr>
+            </a:tbl>
+          </a:graphicData>
+        </a:graphic>
+      </p:graphicFrame>
+      <p:graphicFrame>
+        <p:nvGraphicFramePr>
+          <p:cNvPr id="29" name="Tabla 28"/>
+          <p:cNvGraphicFramePr>
+            <a:graphicFrameLocks noGrp="1"/>
+          </p:cNvGraphicFramePr>
           <p:nvPr>
             <p:extLst>
               <p:ext uri="{D42A27DB-BD31-4B8C-83A1-F6EECF244321}">
-                <p14:modId xmlns:p14="http://schemas.microsoft.com/office/powerpoint/2010/main" val="3427282173"/>
+                <p14:modId xmlns:p14="http://schemas.microsoft.com/office/powerpoint/2010/main" val="3174497031"/>
               </p:ext>
             </p:extLst>
           </p:nvPr>
         </p:nvGraphicFramePr>
         <p:xfrm>
-          <a:off x="227269" y="2467252"/>
+          <a:off x="3203502" y="1974652"/>
+          <a:ext cx="6412523" cy="1495839"/>
+        </p:xfrm>
+        <a:graphic>
+          <a:graphicData uri="http://schemas.openxmlformats.org/drawingml/2006/table">
+            <a:tbl>
+              <a:tblPr firstRow="1" bandRow="1">
+                <a:tableStyleId>{D7AC3CCA-C797-4891-BE02-D94E43425B78}</a:tableStyleId>
+              </a:tblPr>
+              <a:tblGrid>
+                <a:gridCol w="2867389">
+                  <a:extLst>
+                    <a:ext uri="{9D8B030D-6E8A-4147-A177-3AD203B41FA5}">
+                      <a16:colId xmlns:a16="http://schemas.microsoft.com/office/drawing/2014/main" val="3108834388"/>
+                    </a:ext>
+                  </a:extLst>
+                </a:gridCol>
+                <a:gridCol w="3545134">
+                  <a:extLst>
+                    <a:ext uri="{9D8B030D-6E8A-4147-A177-3AD203B41FA5}">
+                      <a16:colId xmlns:a16="http://schemas.microsoft.com/office/drawing/2014/main" val="1484549653"/>
+                    </a:ext>
+                  </a:extLst>
+                </a:gridCol>
+              </a:tblGrid>
+              <a:tr h="269517">
+                <a:tc>
+                  <a:txBody>
+                    <a:bodyPr/>
+                    <a:lstStyle/>
+                    <a:p>
+                      <a:pPr marL="0" algn="ctr" defTabSz="914400" rtl="0" eaLnBrk="1" latinLnBrk="0" hangingPunct="1"/>
+                      <a:r>
+                        <a:rPr lang="es-PE" sz="1120" b="0" kern="1200" dirty="0">
+                          <a:solidFill>
+                            <a:schemeClr val="dk1"/>
+                          </a:solidFill>
+                          <a:latin typeface="+mn-lt"/>
+                          <a:ea typeface="+mn-ea"/>
+                          <a:cs typeface="+mn-cs"/>
+                        </a:rPr>
+                        <a:t>MÓDULO I</a:t>
+                      </a:r>
+                      <a:endParaRPr lang="en-US" sz="1120" b="0" kern="1200" dirty="0">
+                        <a:solidFill>
+                          <a:schemeClr val="dk1"/>
+                        </a:solidFill>
+                        <a:latin typeface="+mn-lt"/>
+                        <a:ea typeface="+mn-ea"/>
+                        <a:cs typeface="+mn-cs"/>
+                      </a:endParaRPr>
+                    </a:p>
+                  </a:txBody>
+                  <a:tcPr anchor="ctr"/>
+                </a:tc>
+                <a:tc>
+                  <a:txBody>
+                    <a:bodyPr/>
+                    <a:lstStyle/>
+                    <a:p>
+                      <a:pPr algn="ctr"/>
+                      <a:r>
+                        <a:rPr lang="es-ES" sz="1000" b="0" i="0" kern="1200" dirty="0">
+                          <a:solidFill>
+                            <a:schemeClr val="dk1"/>
+                          </a:solidFill>
+                          <a:effectLst/>
+                          <a:latin typeface="+mn-lt"/>
+                          <a:ea typeface="+mn-ea"/>
+                          <a:cs typeface="+mn-cs"/>
+                        </a:rPr>
+                        <a:t>{{MODULO_1}}</a:t>
+                      </a:r>
+                    </a:p>
+                  </a:txBody>
+                  <a:tcPr anchor="ctr"/>
+                </a:tc>
+                <a:extLst>
+                  <a:ext uri="{0D108BD9-81ED-4DB2-BD59-A6C34878D82A}">
+                    <a16:rowId xmlns:a16="http://schemas.microsoft.com/office/drawing/2014/main" val="200180495"/>
+                  </a:ext>
+                </a:extLst>
+              </a:tr>
+              <a:tr h="269517">
+                <a:tc>
+                  <a:txBody>
+                    <a:bodyPr/>
+                    <a:lstStyle/>
+                    <a:p>
+                      <a:pPr marL="0" algn="ctr" defTabSz="914400" rtl="0" eaLnBrk="1" latinLnBrk="0" hangingPunct="1"/>
+                      <a:r>
+                        <a:rPr lang="es-PE" sz="1120" kern="1200" dirty="0">
+                          <a:solidFill>
+                            <a:schemeClr val="dk1"/>
+                          </a:solidFill>
+                          <a:latin typeface="+mn-lt"/>
+                          <a:ea typeface="+mn-ea"/>
+                          <a:cs typeface="+mn-cs"/>
+                        </a:rPr>
+                        <a:t>MÓDULO II</a:t>
+                      </a:r>
+                      <a:endParaRPr lang="en-US" sz="1120" kern="1200" dirty="0">
+                        <a:solidFill>
+                          <a:schemeClr val="dk1"/>
+                        </a:solidFill>
+                        <a:latin typeface="+mn-lt"/>
+                        <a:ea typeface="+mn-ea"/>
+                        <a:cs typeface="+mn-cs"/>
+                      </a:endParaRPr>
+                    </a:p>
+                  </a:txBody>
+                  <a:tcPr anchor="ctr"/>
+                </a:tc>
+                <a:tc>
+                  <a:txBody>
+                    <a:bodyPr/>
+                    <a:lstStyle/>
+                    <a:p>
+                      <a:pPr algn="ctr"/>
+                      <a:r>
+                        <a:rPr lang="es-ES" sz="1000" b="0" i="0" kern="1200" dirty="0">
+                          <a:solidFill>
+                            <a:schemeClr val="dk1"/>
+                          </a:solidFill>
+                          <a:effectLst/>
+                          <a:latin typeface="+mn-lt"/>
+                          <a:ea typeface="+mn-ea"/>
+                          <a:cs typeface="+mn-cs"/>
+                        </a:rPr>
+                        <a:t>{{MODULO_2}}</a:t>
+                      </a:r>
+                    </a:p>
+                  </a:txBody>
+                  <a:tcPr anchor="ctr"/>
+                </a:tc>
+                <a:extLst>
+                  <a:ext uri="{0D108BD9-81ED-4DB2-BD59-A6C34878D82A}">
+                    <a16:rowId xmlns:a16="http://schemas.microsoft.com/office/drawing/2014/main" val="3180852981"/>
+                  </a:ext>
+                </a:extLst>
+              </a:tr>
+              <a:tr h="400568">
+                <a:tc>
+                  <a:txBody>
+                    <a:bodyPr/>
+                    <a:lstStyle/>
+                    <a:p>
+                      <a:pPr marL="0" algn="ctr" defTabSz="914400" rtl="0" eaLnBrk="1" latinLnBrk="0" hangingPunct="1"/>
+                      <a:r>
+                        <a:rPr lang="es-PE" sz="1120" kern="1200" dirty="0">
+                          <a:solidFill>
+                            <a:schemeClr val="dk1"/>
+                          </a:solidFill>
+                          <a:latin typeface="+mn-lt"/>
+                          <a:ea typeface="+mn-ea"/>
+                          <a:cs typeface="+mn-cs"/>
+                        </a:rPr>
+                        <a:t>MÓDULO III</a:t>
+                      </a:r>
+                      <a:endParaRPr lang="en-US" sz="1120" kern="1200" dirty="0">
+                        <a:solidFill>
+                          <a:schemeClr val="dk1"/>
+                        </a:solidFill>
+                        <a:latin typeface="+mn-lt"/>
+                        <a:ea typeface="+mn-ea"/>
+                        <a:cs typeface="+mn-cs"/>
+                      </a:endParaRPr>
+                    </a:p>
+                  </a:txBody>
+                  <a:tcPr anchor="ctr"/>
+                </a:tc>
+                <a:tc>
+                  <a:txBody>
+                    <a:bodyPr/>
+                    <a:lstStyle/>
+                    <a:p>
+                      <a:pPr algn="ctr"/>
+                      <a:r>
+                        <a:rPr lang="es-ES" sz="1000" b="0" i="0" kern="1200" dirty="0">
+                          <a:solidFill>
+                            <a:schemeClr val="dk1"/>
+                          </a:solidFill>
+                          <a:effectLst/>
+                          <a:latin typeface="+mn-lt"/>
+                          <a:ea typeface="+mn-ea"/>
+                          <a:cs typeface="+mn-cs"/>
+                        </a:rPr>
+                        <a:t>{{MODULO_3}}</a:t>
+                      </a:r>
+                    </a:p>
+                  </a:txBody>
+                  <a:tcPr anchor="ctr"/>
+                </a:tc>
+                <a:extLst>
+                  <a:ext uri="{0D108BD9-81ED-4DB2-BD59-A6C34878D82A}">
+                    <a16:rowId xmlns:a16="http://schemas.microsoft.com/office/drawing/2014/main" val="4272501331"/>
+                  </a:ext>
+                </a:extLst>
+              </a:tr>
+              <a:tr h="294109">
+                <a:tc>
+                  <a:txBody>
+                    <a:bodyPr/>
+                    <a:lstStyle/>
+                    <a:p>
+                      <a:pPr marL="0" algn="ctr" defTabSz="914400" rtl="0" eaLnBrk="1" latinLnBrk="0" hangingPunct="1"/>
+                      <a:r>
+                        <a:rPr lang="es-PE" sz="1120" kern="1200" dirty="0">
+                          <a:solidFill>
+                            <a:schemeClr val="dk1"/>
+                          </a:solidFill>
+                          <a:latin typeface="+mn-lt"/>
+                          <a:ea typeface="+mn-ea"/>
+                          <a:cs typeface="+mn-cs"/>
+                        </a:rPr>
+                        <a:t>MÓDULO IV</a:t>
+                      </a:r>
+                      <a:endParaRPr lang="en-US" sz="1120" kern="1200" dirty="0">
+                        <a:solidFill>
+                          <a:schemeClr val="dk1"/>
+                        </a:solidFill>
+                        <a:latin typeface="+mn-lt"/>
+                        <a:ea typeface="+mn-ea"/>
+                        <a:cs typeface="+mn-cs"/>
+                      </a:endParaRPr>
+                    </a:p>
+                  </a:txBody>
+                  <a:tcPr anchor="ctr"/>
+                </a:tc>
+                <a:tc>
+                  <a:txBody>
+                    <a:bodyPr/>
+                    <a:lstStyle/>
+                    <a:p>
+                      <a:pPr algn="ctr"/>
+                      <a:r>
+                        <a:rPr lang="es-ES" sz="1000" b="0" i="0" kern="1200" dirty="0">
+                          <a:solidFill>
+                            <a:schemeClr val="dk1"/>
+                          </a:solidFill>
+                          <a:effectLst/>
+                          <a:latin typeface="+mn-lt"/>
+                          <a:ea typeface="+mn-ea"/>
+                          <a:cs typeface="+mn-cs"/>
+                        </a:rPr>
+                        <a:t>{{MODULO_4}}</a:t>
+                      </a:r>
+                    </a:p>
+                  </a:txBody>
+                  <a:tcPr anchor="ctr"/>
+                </a:tc>
+                <a:extLst>
+                  <a:ext uri="{0D108BD9-81ED-4DB2-BD59-A6C34878D82A}">
+                    <a16:rowId xmlns:a16="http://schemas.microsoft.com/office/drawing/2014/main" val="2661531471"/>
+                  </a:ext>
+                </a:extLst>
+              </a:tr>
+              <a:tr h="182174">
+                <a:tc>
+                  <a:txBody>
+                    <a:bodyPr/>
+                    <a:lstStyle/>
+                    <a:p>
+                      <a:pPr marL="0" algn="ctr" defTabSz="914400" rtl="0" eaLnBrk="1" latinLnBrk="0" hangingPunct="1"/>
+                      <a:r>
+                        <a:rPr lang="es-PE" sz="1120" kern="1200" dirty="0">
+                          <a:solidFill>
+                            <a:schemeClr val="dk1"/>
+                          </a:solidFill>
+                          <a:latin typeface="+mn-lt"/>
+                          <a:ea typeface="+mn-ea"/>
+                          <a:cs typeface="+mn-cs"/>
+                        </a:rPr>
+                        <a:t>MÓDULO V</a:t>
+                      </a:r>
+                      <a:endParaRPr lang="en-US" sz="1120" kern="1200" dirty="0">
+                        <a:solidFill>
+                          <a:schemeClr val="dk1"/>
+                        </a:solidFill>
+                        <a:latin typeface="+mn-lt"/>
+                        <a:ea typeface="+mn-ea"/>
+                        <a:cs typeface="+mn-cs"/>
+                      </a:endParaRPr>
+                    </a:p>
+                  </a:txBody>
+                  <a:tcPr anchor="ctr"/>
+                </a:tc>
+                <a:tc>
+                  <a:txBody>
+                    <a:bodyPr/>
+                    <a:lstStyle/>
+                    <a:p>
+                      <a:pPr algn="ctr"/>
+                      <a:r>
+                        <a:rPr lang="es-ES" sz="1000" b="0" i="0" kern="1200" dirty="0">
+                          <a:solidFill>
+                            <a:schemeClr val="dk1"/>
+                          </a:solidFill>
+                          <a:effectLst/>
+                          <a:latin typeface="+mn-lt"/>
+                          <a:ea typeface="+mn-ea"/>
+                          <a:cs typeface="+mn-cs"/>
+                        </a:rPr>
+                        <a:t>{{MODULO_5}}</a:t>
+                      </a:r>
+                    </a:p>
+                  </a:txBody>
+                  <a:tcPr anchor="ctr"/>
+                </a:tc>
+                <a:extLst>
+                  <a:ext uri="{0D108BD9-81ED-4DB2-BD59-A6C34878D82A}">
+                    <a16:rowId xmlns:a16="http://schemas.microsoft.com/office/drawing/2014/main" val="3024625614"/>
+                  </a:ext>
+                </a:extLst>
+              </a:tr>
+            </a:tbl>
+          </a:graphicData>
+        </a:graphic>
+      </p:graphicFrame>
+      <p:grpSp>
+        <p:nvGrpSpPr>
+          <p:cNvPr id="2" name="Grupo 1">
+            <a:extLst>
+              <a:ext uri="{FF2B5EF4-FFF2-40B4-BE49-F238E27FC236}">
+                <a16:creationId xmlns:a16="http://schemas.microsoft.com/office/drawing/2014/main" id="{0285E362-8AB4-23F9-C75C-E094870657DF}"/>
+              </a:ext>
+            </a:extLst>
+          </p:cNvPr>
+          <p:cNvGrpSpPr/>
+          <p:nvPr/>
+        </p:nvGrpSpPr>
+        <p:grpSpPr>
+          <a:xfrm>
+            <a:off x="611025" y="6108603"/>
+            <a:ext cx="2297657" cy="437033"/>
+            <a:chOff x="4281274" y="8807352"/>
+            <a:chExt cx="2297657" cy="437033"/>
+          </a:xfrm>
+        </p:grpSpPr>
+        <p:sp>
+          <p:nvSpPr>
+            <p:cNvPr id="5" name="Rectángulo 4">
+              <a:extLst>
+                <a:ext uri="{FF2B5EF4-FFF2-40B4-BE49-F238E27FC236}">
+                  <a16:creationId xmlns:a16="http://schemas.microsoft.com/office/drawing/2014/main" id="{E0A46DE0-4206-1407-A8C2-63B7396BEB4C}"/>
+                </a:ext>
+              </a:extLst>
+            </p:cNvPr>
+            <p:cNvSpPr/>
+            <p:nvPr/>
+          </p:nvSpPr>
+          <p:spPr>
+            <a:xfrm>
+              <a:off x="4312624" y="8807352"/>
+              <a:ext cx="2213928" cy="437033"/>
+            </a:xfrm>
+            <a:prstGeom prst="rect">
+              <a:avLst/>
+            </a:prstGeom>
+            <a:noFill/>
+          </p:spPr>
+          <p:style>
+            <a:lnRef idx="2">
+              <a:schemeClr val="accent1">
+                <a:shade val="15000"/>
+              </a:schemeClr>
+            </a:lnRef>
+            <a:fillRef idx="1">
+              <a:schemeClr val="accent1"/>
+            </a:fillRef>
+            <a:effectRef idx="0">
+              <a:schemeClr val="accent1"/>
+            </a:effectRef>
+            <a:fontRef idx="minor">
+              <a:schemeClr val="lt1"/>
+            </a:fontRef>
+          </p:style>
+          <p:txBody>
+            <a:bodyPr rtlCol="0" anchor="ctr"/>
+            <a:lstStyle/>
+            <a:p>
+              <a:pPr algn="ctr"/>
+              <a:endParaRPr lang="es-PE"/>
+            </a:p>
+          </p:txBody>
+        </p:sp>
+        <p:sp>
+          <p:nvSpPr>
+            <p:cNvPr id="7" name="CuadroTexto 6">
+              <a:extLst>
+                <a:ext uri="{FF2B5EF4-FFF2-40B4-BE49-F238E27FC236}">
+                  <a16:creationId xmlns:a16="http://schemas.microsoft.com/office/drawing/2014/main" id="{D211A08D-4E13-5AB5-60E4-A6F4E4D4541D}"/>
+                </a:ext>
+              </a:extLst>
+            </p:cNvPr>
+            <p:cNvSpPr txBox="1"/>
+            <p:nvPr/>
+          </p:nvSpPr>
+          <p:spPr>
+            <a:xfrm>
+              <a:off x="4281274" y="8809560"/>
+              <a:ext cx="2297657" cy="392415"/>
+            </a:xfrm>
+            <a:prstGeom prst="rect">
+              <a:avLst/>
+            </a:prstGeom>
+            <a:noFill/>
+          </p:spPr>
+          <p:txBody>
+            <a:bodyPr wrap="square" rtlCol="0">
+              <a:spAutoFit/>
+            </a:bodyPr>
+            <a:lstStyle/>
+            <a:p>
+              <a:r>
+                <a:rPr lang="es-PE" sz="650" b="1" dirty="0"/>
+                <a:t>PARA POSTERIOR VERIFICACIÓN DE ESTE CERTIFICADO SE PUEDE REALIZAR INGRESANDO EL CÓDIGO DEL ESTUDIANTE EN: </a:t>
+              </a:r>
+              <a:r>
+                <a:rPr lang="es-PE" sz="650" b="1" dirty="0">
+                  <a:hlinkClick r:id="rId5"/>
+                </a:rPr>
+                <a:t>https://especializacionvirtual.com/validar-certificado/</a:t>
+              </a:r>
+              <a:r>
+                <a:rPr lang="es-PE" sz="650" b="1" dirty="0"/>
+                <a:t> </a:t>
+              </a:r>
+            </a:p>
+          </p:txBody>
+        </p:sp>
+      </p:grpSp>
+      <p:graphicFrame>
+        <p:nvGraphicFramePr>
+          <p:cNvPr id="9" name="Tabla 8">
+            <a:extLst>
+              <a:ext uri="{FF2B5EF4-FFF2-40B4-BE49-F238E27FC236}">
+                <a16:creationId xmlns:a16="http://schemas.microsoft.com/office/drawing/2014/main" id="{98EC4024-83C4-4092-6CDC-BD6544E245DE}"/>
+              </a:ext>
+            </a:extLst>
+          </p:cNvPr>
+          <p:cNvGraphicFramePr>
+            <a:graphicFrameLocks noGrp="1"/>
+          </p:cNvGraphicFramePr>
+          <p:nvPr>
+            <p:extLst>
+              <p:ext uri="{D42A27DB-BD31-4B8C-83A1-F6EECF244321}">
+                <p14:modId xmlns:p14="http://schemas.microsoft.com/office/powerpoint/2010/main" val="1475880820"/>
+              </p:ext>
+            </p:extLst>
+          </p:nvPr>
+        </p:nvGraphicFramePr>
+        <p:xfrm>
+          <a:off x="227269" y="2243308"/>
           <a:ext cx="2916000" cy="1820685"/>
         </p:xfrm>
         <a:graphic>
@@ -4113,46 +4941,28 @@
           </a:graphicData>
         </a:graphic>
       </p:graphicFrame>
-      <p:pic>
-        <p:nvPicPr>
-          <p:cNvPr id="12" name="Imagen 11"/>
-          <p:cNvPicPr>
-            <a:picLocks noChangeAspect="1"/>
-          </p:cNvPicPr>
-          <p:nvPr/>
-        </p:nvPicPr>
-        <p:blipFill>
-          <a:blip r:embed="rId3"/>
-          <a:stretch>
-            <a:fillRect/>
-          </a:stretch>
-        </p:blipFill>
-        <p:spPr>
-          <a:xfrm>
-            <a:off x="6298442" y="199447"/>
-            <a:ext cx="2957853" cy="758326"/>
-          </a:xfrm>
-          <a:prstGeom prst="rect">
-            <a:avLst/>
-          </a:prstGeom>
-        </p:spPr>
-      </p:pic>
       <p:graphicFrame>
         <p:nvGraphicFramePr>
-          <p:cNvPr id="21" name="Tabla 20"/>
+          <p:cNvPr id="10" name="Tabla 9">
+            <a:extLst>
+              <a:ext uri="{FF2B5EF4-FFF2-40B4-BE49-F238E27FC236}">
+                <a16:creationId xmlns:a16="http://schemas.microsoft.com/office/drawing/2014/main" id="{2CB58EC6-8178-4205-4E0B-A83F55CF67CA}"/>
+              </a:ext>
+            </a:extLst>
+          </p:cNvPr>
           <p:cNvGraphicFramePr>
             <a:graphicFrameLocks noGrp="1"/>
           </p:cNvGraphicFramePr>
           <p:nvPr>
             <p:extLst>
               <p:ext uri="{D42A27DB-BD31-4B8C-83A1-F6EECF244321}">
-                <p14:modId xmlns:p14="http://schemas.microsoft.com/office/powerpoint/2010/main" val="4126049798"/>
+                <p14:modId xmlns:p14="http://schemas.microsoft.com/office/powerpoint/2010/main" val="4134437892"/>
               </p:ext>
             </p:extLst>
           </p:nvPr>
         </p:nvGraphicFramePr>
         <p:xfrm>
-          <a:off x="227269" y="4465779"/>
+          <a:off x="227269" y="4241835"/>
           <a:ext cx="2916000" cy="336094"/>
         </p:xfrm>
         <a:graphic>
@@ -4227,496 +5037,10 @@
       </p:graphicFrame>
       <p:pic>
         <p:nvPicPr>
-          <p:cNvPr id="27" name="Imagen 26"/>
-          <p:cNvPicPr>
-            <a:picLocks noChangeAspect="1"/>
-          </p:cNvPicPr>
-          <p:nvPr/>
-        </p:nvPicPr>
-        <p:blipFill rotWithShape="1">
-          <a:blip r:embed="rId4"/>
-          <a:srcRect l="4716" r="4485"/>
-          <a:stretch/>
-        </p:blipFill>
-        <p:spPr>
-          <a:xfrm>
-            <a:off x="534757" y="230243"/>
-            <a:ext cx="2563572" cy="864296"/>
-          </a:xfrm>
-          <a:prstGeom prst="rect">
-            <a:avLst/>
-          </a:prstGeom>
-        </p:spPr>
-      </p:pic>
-      <p:sp>
-        <p:nvSpPr>
-          <p:cNvPr id="28" name="CuadroTexto 27"/>
-          <p:cNvSpPr txBox="1"/>
-          <p:nvPr/>
-        </p:nvSpPr>
-        <p:spPr>
-          <a:xfrm>
-            <a:off x="792801" y="982048"/>
-            <a:ext cx="1642822" cy="338554"/>
-          </a:xfrm>
-          <a:prstGeom prst="rect">
-            <a:avLst/>
-          </a:prstGeom>
-          <a:noFill/>
-        </p:spPr>
-        <p:txBody>
-          <a:bodyPr wrap="none" rtlCol="0">
-            <a:spAutoFit/>
-          </a:bodyPr>
-          <a:lstStyle/>
-          <a:p>
-            <a:r>
-              <a:rPr lang="es-PE" sz="1600" b="1" dirty="0"/>
-              <a:t>R.P N° 1127 1967</a:t>
-            </a:r>
-          </a:p>
-        </p:txBody>
-      </p:sp>
-      <p:graphicFrame>
-        <p:nvGraphicFramePr>
-          <p:cNvPr id="24" name="Tabla 23"/>
-          <p:cNvGraphicFramePr>
-            <a:graphicFrameLocks noGrp="1"/>
-          </p:cNvGraphicFramePr>
-          <p:nvPr/>
-        </p:nvGraphicFramePr>
-        <p:xfrm>
-          <a:off x="3203501" y="1539657"/>
-          <a:ext cx="6412523" cy="434622"/>
-        </p:xfrm>
-        <a:graphic>
-          <a:graphicData uri="http://schemas.openxmlformats.org/drawingml/2006/table">
-            <a:tbl>
-              <a:tblPr firstRow="1" bandRow="1">
-                <a:tableStyleId>{F5AB1C69-6EDB-4FF4-983F-18BD219EF322}</a:tableStyleId>
-              </a:tblPr>
-              <a:tblGrid>
-                <a:gridCol w="6412523">
-                  <a:extLst>
-                    <a:ext uri="{9D8B030D-6E8A-4147-A177-3AD203B41FA5}">
-                      <a16:colId xmlns:a16="http://schemas.microsoft.com/office/drawing/2014/main" val="335546556"/>
-                    </a:ext>
-                  </a:extLst>
-                </a:gridCol>
-              </a:tblGrid>
-              <a:tr h="308522">
-                <a:tc>
-                  <a:txBody>
-                    <a:bodyPr/>
-                    <a:lstStyle/>
-                    <a:p>
-                      <a:pPr algn="ctr"/>
-                      <a:r>
-                        <a:rPr lang="es-PE" sz="1600" u="none" dirty="0"/>
-                        <a:t>TEMARIO</a:t>
-                      </a:r>
-                      <a:endParaRPr lang="es-PE" sz="1600" u="none" baseline="0" dirty="0">
-                        <a:latin typeface="Arial Black" panose="020B0A04020102020204" pitchFamily="34" charset="0"/>
-                      </a:endParaRPr>
-                    </a:p>
-                  </a:txBody>
-                  <a:tcPr marL="190782" marR="190782" marT="95391" marB="95391" anchor="ctr">
-                    <a:lnL w="12700" cap="flat" cmpd="sng" algn="ctr">
-                      <a:solidFill>
-                        <a:schemeClr val="tx1"/>
-                      </a:solidFill>
-                      <a:prstDash val="solid"/>
-                      <a:round/>
-                      <a:headEnd type="none" w="med" len="med"/>
-                      <a:tailEnd type="none" w="med" len="med"/>
-                    </a:lnL>
-                    <a:lnR w="12700" cap="flat" cmpd="sng" algn="ctr">
-                      <a:solidFill>
-                        <a:schemeClr val="tx1"/>
-                      </a:solidFill>
-                      <a:prstDash val="solid"/>
-                      <a:round/>
-                      <a:headEnd type="none" w="med" len="med"/>
-                      <a:tailEnd type="none" w="med" len="med"/>
-                    </a:lnR>
-                    <a:lnT w="12700" cap="flat" cmpd="sng" algn="ctr">
-                      <a:solidFill>
-                        <a:schemeClr val="tx1"/>
-                      </a:solidFill>
-                      <a:prstDash val="solid"/>
-                      <a:round/>
-                      <a:headEnd type="none" w="med" len="med"/>
-                      <a:tailEnd type="none" w="med" len="med"/>
-                    </a:lnT>
-                    <a:lnB w="12700" cap="flat" cmpd="sng" algn="ctr">
-                      <a:solidFill>
-                        <a:schemeClr val="tx1"/>
-                      </a:solidFill>
-                      <a:prstDash val="solid"/>
-                      <a:round/>
-                      <a:headEnd type="none" w="med" len="med"/>
-                      <a:tailEnd type="none" w="med" len="med"/>
-                    </a:lnB>
-                    <a:lnTlToBr w="12700" cmpd="sng">
-                      <a:noFill/>
-                      <a:prstDash val="solid"/>
-                    </a:lnTlToBr>
-                    <a:lnBlToTr w="12700" cmpd="sng">
-                      <a:noFill/>
-                      <a:prstDash val="solid"/>
-                    </a:lnBlToTr>
-                  </a:tcPr>
-                </a:tc>
-                <a:extLst>
-                  <a:ext uri="{0D108BD9-81ED-4DB2-BD59-A6C34878D82A}">
-                    <a16:rowId xmlns:a16="http://schemas.microsoft.com/office/drawing/2014/main" val="4034874865"/>
-                  </a:ext>
-                </a:extLst>
-              </a:tr>
-            </a:tbl>
-          </a:graphicData>
-        </a:graphic>
-      </p:graphicFrame>
-      <p:graphicFrame>
-        <p:nvGraphicFramePr>
-          <p:cNvPr id="29" name="Tabla 28"/>
-          <p:cNvGraphicFramePr>
-            <a:graphicFrameLocks noGrp="1"/>
-          </p:cNvGraphicFramePr>
-          <p:nvPr>
-            <p:extLst>
-              <p:ext uri="{D42A27DB-BD31-4B8C-83A1-F6EECF244321}">
-                <p14:modId xmlns:p14="http://schemas.microsoft.com/office/powerpoint/2010/main" val="2070939982"/>
-              </p:ext>
-            </p:extLst>
-          </p:nvPr>
-        </p:nvGraphicFramePr>
-        <p:xfrm>
-          <a:off x="3203502" y="1974652"/>
-          <a:ext cx="6412523" cy="1492791"/>
-        </p:xfrm>
-        <a:graphic>
-          <a:graphicData uri="http://schemas.openxmlformats.org/drawingml/2006/table">
-            <a:tbl>
-              <a:tblPr firstRow="1" bandRow="1">
-                <a:tableStyleId>{D7AC3CCA-C797-4891-BE02-D94E43425B78}</a:tableStyleId>
-              </a:tblPr>
-              <a:tblGrid>
-                <a:gridCol w="2867389">
-                  <a:extLst>
-                    <a:ext uri="{9D8B030D-6E8A-4147-A177-3AD203B41FA5}">
-                      <a16:colId xmlns:a16="http://schemas.microsoft.com/office/drawing/2014/main" val="3108834388"/>
-                    </a:ext>
-                  </a:extLst>
-                </a:gridCol>
-                <a:gridCol w="3545134">
-                  <a:extLst>
-                    <a:ext uri="{9D8B030D-6E8A-4147-A177-3AD203B41FA5}">
-                      <a16:colId xmlns:a16="http://schemas.microsoft.com/office/drawing/2014/main" val="1484549653"/>
-                    </a:ext>
-                  </a:extLst>
-                </a:gridCol>
-              </a:tblGrid>
-              <a:tr h="269517">
-                <a:tc>
-                  <a:txBody>
-                    <a:bodyPr/>
-                    <a:lstStyle/>
-                    <a:p>
-                      <a:pPr marL="0" algn="ctr" defTabSz="914400" rtl="0" eaLnBrk="1" latinLnBrk="0" hangingPunct="1"/>
-                      <a:r>
-                        <a:rPr lang="es-PE" sz="1100" b="0" kern="1200" dirty="0">
-                          <a:solidFill>
-                            <a:schemeClr val="dk1"/>
-                          </a:solidFill>
-                          <a:latin typeface="+mn-lt"/>
-                          <a:ea typeface="+mn-ea"/>
-                          <a:cs typeface="+mn-cs"/>
-                        </a:rPr>
-                        <a:t>MÓDULO I</a:t>
-                      </a:r>
-                      <a:endParaRPr lang="en-US" sz="1100" b="0" kern="1200" dirty="0">
-                        <a:solidFill>
-                          <a:schemeClr val="dk1"/>
-                        </a:solidFill>
-                        <a:latin typeface="+mn-lt"/>
-                        <a:ea typeface="+mn-ea"/>
-                        <a:cs typeface="+mn-cs"/>
-                      </a:endParaRPr>
-                    </a:p>
-                  </a:txBody>
-                  <a:tcPr anchor="ctr"/>
-                </a:tc>
-                <a:tc>
-                  <a:txBody>
-                    <a:bodyPr/>
-                    <a:lstStyle/>
-                    <a:p>
-                      <a:pPr algn="ctr"/>
-                      <a:r>
-                        <a:rPr lang="es-ES" sz="1100" b="0" i="0" kern="1200" dirty="0">
-                          <a:solidFill>
-                            <a:schemeClr val="dk1"/>
-                          </a:solidFill>
-                          <a:effectLst/>
-                          <a:latin typeface="+mn-lt"/>
-                          <a:ea typeface="+mn-ea"/>
-                          <a:cs typeface="+mn-cs"/>
-                        </a:rPr>
-                        <a:t>{{MODULO_1}}</a:t>
-                      </a:r>
-                    </a:p>
-                  </a:txBody>
-                  <a:tcPr anchor="ctr"/>
-                </a:tc>
-                <a:extLst>
-                  <a:ext uri="{0D108BD9-81ED-4DB2-BD59-A6C34878D82A}">
-                    <a16:rowId xmlns:a16="http://schemas.microsoft.com/office/drawing/2014/main" val="200180495"/>
-                  </a:ext>
-                </a:extLst>
-              </a:tr>
-              <a:tr h="269517">
-                <a:tc>
-                  <a:txBody>
-                    <a:bodyPr/>
-                    <a:lstStyle/>
-                    <a:p>
-                      <a:pPr marL="0" algn="ctr" defTabSz="914400" rtl="0" eaLnBrk="1" latinLnBrk="0" hangingPunct="1"/>
-                      <a:r>
-                        <a:rPr lang="es-PE" sz="1100" kern="1200" dirty="0">
-                          <a:solidFill>
-                            <a:schemeClr val="dk1"/>
-                          </a:solidFill>
-                          <a:latin typeface="+mn-lt"/>
-                          <a:ea typeface="+mn-ea"/>
-                          <a:cs typeface="+mn-cs"/>
-                        </a:rPr>
-                        <a:t>MÓDULO II</a:t>
-                      </a:r>
-                      <a:endParaRPr lang="en-US" sz="1100" kern="1200" dirty="0">
-                        <a:solidFill>
-                          <a:schemeClr val="dk1"/>
-                        </a:solidFill>
-                        <a:latin typeface="+mn-lt"/>
-                        <a:ea typeface="+mn-ea"/>
-                        <a:cs typeface="+mn-cs"/>
-                      </a:endParaRPr>
-                    </a:p>
-                  </a:txBody>
-                  <a:tcPr anchor="ctr"/>
-                </a:tc>
-                <a:tc>
-                  <a:txBody>
-                    <a:bodyPr/>
-                    <a:lstStyle/>
-                    <a:p>
-                      <a:pPr algn="ctr"/>
-                      <a:r>
-                        <a:rPr lang="es-ES" sz="1100" b="0" i="0" kern="1200" dirty="0">
-                          <a:solidFill>
-                            <a:schemeClr val="dk1"/>
-                          </a:solidFill>
-                          <a:effectLst/>
-                          <a:latin typeface="+mn-lt"/>
-                          <a:ea typeface="+mn-ea"/>
-                          <a:cs typeface="+mn-cs"/>
-                        </a:rPr>
-                        <a:t>{{MODULO_2}}</a:t>
-                      </a:r>
-                    </a:p>
-                  </a:txBody>
-                  <a:tcPr anchor="ctr"/>
-                </a:tc>
-                <a:extLst>
-                  <a:ext uri="{0D108BD9-81ED-4DB2-BD59-A6C34878D82A}">
-                    <a16:rowId xmlns:a16="http://schemas.microsoft.com/office/drawing/2014/main" val="3180852981"/>
-                  </a:ext>
-                </a:extLst>
-              </a:tr>
-              <a:tr h="400568">
-                <a:tc>
-                  <a:txBody>
-                    <a:bodyPr/>
-                    <a:lstStyle/>
-                    <a:p>
-                      <a:pPr marL="0" algn="ctr" defTabSz="914400" rtl="0" eaLnBrk="1" latinLnBrk="0" hangingPunct="1"/>
-                      <a:r>
-                        <a:rPr lang="es-PE" sz="1100" kern="1200" dirty="0">
-                          <a:solidFill>
-                            <a:schemeClr val="dk1"/>
-                          </a:solidFill>
-                          <a:latin typeface="+mn-lt"/>
-                          <a:ea typeface="+mn-ea"/>
-                          <a:cs typeface="+mn-cs"/>
-                        </a:rPr>
-                        <a:t>MÓDULO III</a:t>
-                      </a:r>
-                      <a:endParaRPr lang="en-US" sz="1100" kern="1200" dirty="0">
-                        <a:solidFill>
-                          <a:schemeClr val="dk1"/>
-                        </a:solidFill>
-                        <a:latin typeface="+mn-lt"/>
-                        <a:ea typeface="+mn-ea"/>
-                        <a:cs typeface="+mn-cs"/>
-                      </a:endParaRPr>
-                    </a:p>
-                  </a:txBody>
-                  <a:tcPr anchor="ctr"/>
-                </a:tc>
-                <a:tc>
-                  <a:txBody>
-                    <a:bodyPr/>
-                    <a:lstStyle/>
-                    <a:p>
-                      <a:pPr algn="ctr"/>
-                      <a:r>
-                        <a:rPr lang="es-ES" sz="1100" b="0" i="0" kern="1200" dirty="0">
-                          <a:solidFill>
-                            <a:schemeClr val="dk1"/>
-                          </a:solidFill>
-                          <a:effectLst/>
-                          <a:latin typeface="+mn-lt"/>
-                          <a:ea typeface="+mn-ea"/>
-                          <a:cs typeface="+mn-cs"/>
-                        </a:rPr>
-                        <a:t>{{MODULO_3}}</a:t>
-                      </a:r>
-                    </a:p>
-                  </a:txBody>
-                  <a:tcPr anchor="ctr"/>
-                </a:tc>
-                <a:extLst>
-                  <a:ext uri="{0D108BD9-81ED-4DB2-BD59-A6C34878D82A}">
-                    <a16:rowId xmlns:a16="http://schemas.microsoft.com/office/drawing/2014/main" val="4272501331"/>
-                  </a:ext>
-                </a:extLst>
-              </a:tr>
-              <a:tr h="294109">
-                <a:tc>
-                  <a:txBody>
-                    <a:bodyPr/>
-                    <a:lstStyle/>
-                    <a:p>
-                      <a:pPr marL="0" algn="ctr" defTabSz="914400" rtl="0" eaLnBrk="1" latinLnBrk="0" hangingPunct="1"/>
-                      <a:r>
-                        <a:rPr lang="es-PE" sz="1100" kern="1200" dirty="0">
-                          <a:solidFill>
-                            <a:schemeClr val="dk1"/>
-                          </a:solidFill>
-                          <a:latin typeface="+mn-lt"/>
-                          <a:ea typeface="+mn-ea"/>
-                          <a:cs typeface="+mn-cs"/>
-                        </a:rPr>
-                        <a:t>MÓDULO IV</a:t>
-                      </a:r>
-                      <a:endParaRPr lang="en-US" sz="1100" kern="1200" dirty="0">
-                        <a:solidFill>
-                          <a:schemeClr val="dk1"/>
-                        </a:solidFill>
-                        <a:latin typeface="+mn-lt"/>
-                        <a:ea typeface="+mn-ea"/>
-                        <a:cs typeface="+mn-cs"/>
-                      </a:endParaRPr>
-                    </a:p>
-                  </a:txBody>
-                  <a:tcPr anchor="ctr"/>
-                </a:tc>
-                <a:tc>
-                  <a:txBody>
-                    <a:bodyPr/>
-                    <a:lstStyle/>
-                    <a:p>
-                      <a:pPr algn="ctr"/>
-                      <a:r>
-                        <a:rPr lang="es-ES" sz="1100" b="0" i="0" kern="1200" dirty="0">
-                          <a:solidFill>
-                            <a:schemeClr val="dk1"/>
-                          </a:solidFill>
-                          <a:effectLst/>
-                          <a:latin typeface="+mn-lt"/>
-                          <a:ea typeface="+mn-ea"/>
-                          <a:cs typeface="+mn-cs"/>
-                        </a:rPr>
-                        <a:t>{{MODULO_4}}</a:t>
-                      </a:r>
-                    </a:p>
-                  </a:txBody>
-                  <a:tcPr anchor="ctr"/>
-                </a:tc>
-                <a:extLst>
-                  <a:ext uri="{0D108BD9-81ED-4DB2-BD59-A6C34878D82A}">
-                    <a16:rowId xmlns:a16="http://schemas.microsoft.com/office/drawing/2014/main" val="2661531471"/>
-                  </a:ext>
-                </a:extLst>
-              </a:tr>
-              <a:tr h="182174">
-                <a:tc>
-                  <a:txBody>
-                    <a:bodyPr/>
-                    <a:lstStyle/>
-                    <a:p>
-                      <a:pPr marL="0" algn="ctr" defTabSz="914400" rtl="0" eaLnBrk="1" latinLnBrk="0" hangingPunct="1"/>
-                      <a:r>
-                        <a:rPr lang="es-PE" sz="1100" kern="1200" dirty="0">
-                          <a:solidFill>
-                            <a:schemeClr val="dk1"/>
-                          </a:solidFill>
-                          <a:latin typeface="+mn-lt"/>
-                          <a:ea typeface="+mn-ea"/>
-                          <a:cs typeface="+mn-cs"/>
-                        </a:rPr>
-                        <a:t>MÓDULO V</a:t>
-                      </a:r>
-                      <a:endParaRPr lang="en-US" sz="1100" kern="1200" dirty="0">
-                        <a:solidFill>
-                          <a:schemeClr val="dk1"/>
-                        </a:solidFill>
-                        <a:latin typeface="+mn-lt"/>
-                        <a:ea typeface="+mn-ea"/>
-                        <a:cs typeface="+mn-cs"/>
-                      </a:endParaRPr>
-                    </a:p>
-                  </a:txBody>
-                  <a:tcPr anchor="ctr"/>
-                </a:tc>
-                <a:tc>
-                  <a:txBody>
-                    <a:bodyPr/>
-                    <a:lstStyle/>
-                    <a:p>
-                      <a:pPr algn="ctr"/>
-                      <a:r>
-                        <a:rPr lang="es-ES" sz="1100" b="0" i="0" kern="1200" dirty="0">
-                          <a:solidFill>
-                            <a:schemeClr val="dk1"/>
-                          </a:solidFill>
-                          <a:effectLst/>
-                          <a:latin typeface="+mn-lt"/>
-                          <a:ea typeface="+mn-ea"/>
-                          <a:cs typeface="+mn-cs"/>
-                        </a:rPr>
-                        <a:t>{{MODULO_5}}</a:t>
-                      </a:r>
-                    </a:p>
-                  </a:txBody>
-                  <a:tcPr anchor="ctr"/>
-                </a:tc>
-                <a:extLst>
-                  <a:ext uri="{0D108BD9-81ED-4DB2-BD59-A6C34878D82A}">
-                    <a16:rowId xmlns:a16="http://schemas.microsoft.com/office/drawing/2014/main" val="3024625614"/>
-                  </a:ext>
-                </a:extLst>
-              </a:tr>
-            </a:tbl>
-          </a:graphicData>
-        </a:graphic>
-      </p:graphicFrame>
-      <p:pic>
-        <p:nvPicPr>
-          <p:cNvPr id="3" name="Imagen 2">
+          <p:cNvPr id="11" name="Imagen 10">
             <a:extLst>
               <a:ext uri="{FF2B5EF4-FFF2-40B4-BE49-F238E27FC236}">
-                <a16:creationId xmlns:a16="http://schemas.microsoft.com/office/drawing/2014/main" id="{AB7EE0B6-B919-423B-6A1B-5DB7F9F6C8DB}"/>
+                <a16:creationId xmlns:a16="http://schemas.microsoft.com/office/drawing/2014/main" id="{4BE6CA18-ED91-8A8D-69FE-C95D02C0A420}"/>
               </a:ext>
             </a:extLst>
           </p:cNvPr>
@@ -4726,13 +5050,13 @@
           <p:nvPr/>
         </p:nvPicPr>
         <p:blipFill rotWithShape="1">
-          <a:blip r:embed="rId5"/>
+          <a:blip r:embed="rId6"/>
           <a:srcRect b="6974"/>
           <a:stretch/>
         </p:blipFill>
         <p:spPr>
           <a:xfrm>
-            <a:off x="1486822" y="3957005"/>
+            <a:off x="1486822" y="3733061"/>
             <a:ext cx="455266" cy="308814"/>
           </a:xfrm>
           <a:prstGeom prst="rect">
@@ -4742,10 +5066,10 @@
       </p:pic>
       <p:sp>
         <p:nvSpPr>
-          <p:cNvPr id="4" name="CuadroTexto 3">
+          <p:cNvPr id="13" name="CuadroTexto 12">
             <a:extLst>
               <a:ext uri="{FF2B5EF4-FFF2-40B4-BE49-F238E27FC236}">
-                <a16:creationId xmlns:a16="http://schemas.microsoft.com/office/drawing/2014/main" id="{385E0D12-7AAE-301C-8B48-6FE48D0B69EE}"/>
+                <a16:creationId xmlns:a16="http://schemas.microsoft.com/office/drawing/2014/main" id="{873437E8-7AD9-E519-83CA-BDC25F73BBC3}"/>
               </a:ext>
             </a:extLst>
           </p:cNvPr>
@@ -4754,7 +5078,7 @@
         </p:nvSpPr>
         <p:spPr>
           <a:xfrm>
-            <a:off x="1113988" y="5089855"/>
+            <a:off x="1255776" y="4659232"/>
             <a:ext cx="1397690" cy="369332"/>
           </a:xfrm>
           <a:prstGeom prst="rect">
@@ -4862,10 +5186,83 @@
             </a:lvl9pPr>
           </a:lstStyle>
           <a:p>
+            <a:pPr algn="ctr"/>
             <a:r>
               <a:rPr lang="es-PE" dirty="0"/>
               <a:t>{{QR_CODE}}</a:t>
             </a:r>
+          </a:p>
+        </p:txBody>
+      </p:sp>
+      <p:sp>
+        <p:nvSpPr>
+          <p:cNvPr id="3" name="Rectángulo 2">
+            <a:extLst>
+              <a:ext uri="{FF2B5EF4-FFF2-40B4-BE49-F238E27FC236}">
+                <a16:creationId xmlns:a16="http://schemas.microsoft.com/office/drawing/2014/main" id="{A06F1E4D-5079-EDF6-55A4-1ACC756A857C}"/>
+              </a:ext>
+            </a:extLst>
+          </p:cNvPr>
+          <p:cNvSpPr/>
+          <p:nvPr/>
+        </p:nvSpPr>
+        <p:spPr>
+          <a:xfrm>
+            <a:off x="684240" y="5727842"/>
+            <a:ext cx="2130198" cy="366767"/>
+          </a:xfrm>
+          <a:prstGeom prst="rect">
+            <a:avLst/>
+          </a:prstGeom>
+        </p:spPr>
+        <p:txBody>
+          <a:bodyPr wrap="square">
+            <a:spAutoFit/>
+          </a:bodyPr>
+          <a:lstStyle/>
+          <a:p>
+            <a:pPr lvl="0" algn="ctr">
+              <a:spcBef>
+                <a:spcPts val="59"/>
+              </a:spcBef>
+            </a:pPr>
+            <a:r>
+              <a:rPr lang="es-PE" sz="900" dirty="0">
+                <a:solidFill>
+                  <a:prstClr val="black"/>
+                </a:solidFill>
+                <a:latin typeface="Times New Roman" panose="02020603050405020304" pitchFamily="18" charset="0"/>
+                <a:ea typeface="Cambria Math" panose="02040503050406030204" pitchFamily="18" charset="0"/>
+                <a:cs typeface="Times New Roman" panose="02020603050405020304" pitchFamily="18" charset="0"/>
+              </a:rPr>
+              <a:t>CÓDIGO ESTUDIANTE:</a:t>
+            </a:r>
+          </a:p>
+          <a:p>
+            <a:pPr algn="ctr">
+              <a:spcBef>
+                <a:spcPts val="59"/>
+              </a:spcBef>
+            </a:pPr>
+            <a:r>
+              <a:rPr lang="en-US" sz="800" b="1">
+                <a:solidFill>
+                  <a:prstClr val="black"/>
+                </a:solidFill>
+                <a:latin typeface="Times New Roman" panose="02020603050405020304" pitchFamily="18" charset="0"/>
+                <a:ea typeface="Cambria Math" panose="02040503050406030204" pitchFamily="18" charset="0"/>
+                <a:cs typeface="Times New Roman" panose="02020603050405020304" pitchFamily="18" charset="0"/>
+              </a:rPr>
+              <a:t>{{CODE_STUDENT}}</a:t>
+            </a:r>
+            <a:endParaRPr lang="en-US" sz="800" b="1" dirty="0">
+              <a:solidFill>
+                <a:prstClr val="black"/>
+              </a:solidFill>
+              <a:latin typeface="Times New Roman" panose="02020603050405020304" pitchFamily="18" charset="0"/>
+              <a:ea typeface="Cambria Math" panose="02040503050406030204" pitchFamily="18" charset="0"/>
+              <a:cs typeface="Times New Roman" panose="02020603050405020304" pitchFamily="18" charset="0"/>
+            </a:endParaRPr>
           </a:p>
         </p:txBody>
       </p:sp>
